--- a/elektrokardiogram.pptx
+++ b/elektrokardiogram.pptx
@@ -7779,14 +7779,14 @@
           <a:p>
             <a:pPr eaLnBrk="1" hangingPunct="1"/>
             <a:r>
-              <a:rPr lang="tr-TR" altLang="tr-TR" sz="4200">
+              <a:rPr lang="tr-TR" altLang="tr-TR" sz="4200" dirty="0" err="1">
                 <a:solidFill>
                   <a:srgbClr val="FFFFFF"/>
                 </a:solidFill>
               </a:rPr>
               <a:t>Elektrokardiogram</a:t>
             </a:r>
-            <a:endParaRPr lang="en-US" altLang="tr-TR" sz="4200">
+            <a:endParaRPr lang="en-US" altLang="tr-TR" sz="4200" dirty="0">
               <a:solidFill>
                 <a:srgbClr val="FFFFFF"/>
               </a:solidFill>
@@ -15222,7 +15222,7 @@
         </p:spPr>
         <p:txBody>
           <a:bodyPr anchor="t">
-            <a:normAutofit/>
+            <a:normAutofit fontScale="92500" lnSpcReduction="20000"/>
           </a:bodyPr>
           <a:lstStyle/>
           <a:p>
@@ -15230,12 +15230,9 @@
               <a:spcBef>
                 <a:spcPts val="600"/>
               </a:spcBef>
-              <a:spcAft>
-                <a:spcPts val="600"/>
-              </a:spcAft>
             </a:pPr>
             <a:r>
-              <a:rPr lang="tr-TR" altLang="tr-TR" sz="1200">
+              <a:rPr lang="tr-TR" altLang="tr-TR" sz="1200" dirty="0">
                 <a:solidFill>
                   <a:srgbClr val="0F496F"/>
                 </a:solidFill>
@@ -15243,7 +15240,7 @@
               <a:t>Organların ve dokuların metabolik faaliyetleri için gerekli olan O</a:t>
             </a:r>
             <a:r>
-              <a:rPr lang="tr-TR" altLang="tr-TR" sz="1200" baseline="-25000">
+              <a:rPr lang="tr-TR" altLang="tr-TR" sz="1200" baseline="-25000" dirty="0">
                 <a:solidFill>
                   <a:srgbClr val="0F496F"/>
                 </a:solidFill>
@@ -15251,7 +15248,7 @@
               <a:t>2</a:t>
             </a:r>
             <a:r>
-              <a:rPr lang="tr-TR" altLang="tr-TR" sz="1200">
+              <a:rPr lang="tr-TR" altLang="tr-TR" sz="1200" dirty="0">
                 <a:solidFill>
                   <a:srgbClr val="0F496F"/>
                 </a:solidFill>
@@ -15264,17 +15261,104 @@
               <a:spcBef>
                 <a:spcPts val="600"/>
               </a:spcBef>
-              <a:spcAft>
+            </a:pPr>
+            <a:r>
+              <a:rPr lang="tr-TR" altLang="tr-TR" sz="1200" dirty="0">
+                <a:solidFill>
+                  <a:srgbClr val="0F496F"/>
+                </a:solidFill>
+              </a:rPr>
+              <a:t>İstirahat: ~5 Litre / dakika</a:t>
+            </a:r>
+          </a:p>
+          <a:p>
+            <a:pPr>
+              <a:spcBef>
                 <a:spcPts val="600"/>
-              </a:spcAft>
+              </a:spcBef>
             </a:pPr>
             <a:r>
-              <a:rPr lang="tr-TR" altLang="tr-TR" sz="1200">
+              <a:rPr lang="tr-TR" altLang="tr-TR" sz="1200" dirty="0">
                 <a:solidFill>
                   <a:srgbClr val="0F496F"/>
                 </a:solidFill>
               </a:rPr>
-              <a:t>Erişkinlerde;</a:t>
+              <a:t>Egzersiz (Sedanter birey): ~20 - 25 Litre / dakika. </a:t>
+            </a:r>
+          </a:p>
+          <a:p>
+            <a:pPr>
+              <a:spcBef>
+                <a:spcPts val="600"/>
+              </a:spcBef>
+            </a:pPr>
+            <a:r>
+              <a:rPr lang="tr-TR" altLang="tr-TR" sz="1200" dirty="0">
+                <a:solidFill>
+                  <a:srgbClr val="0F496F"/>
+                </a:solidFill>
+              </a:rPr>
+              <a:t>Egzersiz (Elit sporcu): ~35 - 40 Litre / dakika</a:t>
+            </a:r>
+          </a:p>
+          <a:p>
+            <a:pPr>
+              <a:spcBef>
+                <a:spcPts val="600"/>
+              </a:spcBef>
+            </a:pPr>
+            <a:r>
+              <a:rPr lang="tr-TR" altLang="tr-TR" sz="1200" dirty="0">
+                <a:solidFill>
+                  <a:srgbClr val="0F496F"/>
+                </a:solidFill>
+              </a:rPr>
+              <a:t>İstirahat: Yaklaşık 70 ml.</a:t>
+            </a:r>
+          </a:p>
+          <a:p>
+            <a:pPr>
+              <a:spcBef>
+                <a:spcPts val="600"/>
+              </a:spcBef>
+            </a:pPr>
+            <a:r>
+              <a:rPr lang="tr-TR" altLang="tr-TR" sz="1200" dirty="0">
+                <a:solidFill>
+                  <a:srgbClr val="0F496F"/>
+                </a:solidFill>
+              </a:rPr>
+              <a:t>Hafif/Orta Egzersiz: Yaklaşık 100 - 120 ml.</a:t>
+            </a:r>
+          </a:p>
+          <a:p>
+            <a:pPr>
+              <a:spcBef>
+                <a:spcPts val="600"/>
+              </a:spcBef>
+            </a:pPr>
+            <a:r>
+              <a:rPr lang="tr-TR" altLang="tr-TR" sz="1200" dirty="0">
+                <a:solidFill>
+                  <a:srgbClr val="0F496F"/>
+                </a:solidFill>
+              </a:rPr>
+              <a:t>Yoğun Egzersiz: 150 ml ve üzerine çıkabilir.</a:t>
+            </a:r>
+          </a:p>
+          <a:p>
+            <a:pPr>
+              <a:spcBef>
+                <a:spcPts val="600"/>
+              </a:spcBef>
+            </a:pPr>
+            <a:r>
+              <a:rPr lang="tr-TR" altLang="tr-TR" sz="1200" dirty="0">
+                <a:solidFill>
+                  <a:srgbClr val="0F496F"/>
+                </a:solidFill>
+              </a:rPr>
+              <a:t>Profesyonel Sporcular: Çok yüksek kondisyonlu atletlerde bu miktar 200 ml seviyelerini zorlayabilir.</a:t>
             </a:r>
           </a:p>
           <a:p>
@@ -15284,14 +15368,11 @@
               </a:spcBef>
               <a:buNone/>
             </a:pPr>
-            <a:r>
-              <a:rPr lang="tr-TR" altLang="tr-TR" sz="1200">
-                <a:solidFill>
-                  <a:srgbClr val="0F496F"/>
-                </a:solidFill>
-              </a:rPr>
-              <a:t>      - Dinlenimde: 5 l/dk,</a:t>
-            </a:r>
+            <a:endParaRPr lang="tr-TR" altLang="tr-TR" sz="1200" dirty="0">
+              <a:solidFill>
+                <a:srgbClr val="0F496F"/>
+              </a:solidFill>
+            </a:endParaRPr>
           </a:p>
           <a:p>
             <a:pPr>
@@ -15300,29 +15381,11 @@
               </a:spcBef>
               <a:buNone/>
             </a:pPr>
-            <a:r>
-              <a:rPr lang="tr-TR" altLang="tr-TR" sz="1200">
-                <a:solidFill>
-                  <a:srgbClr val="0F496F"/>
-                </a:solidFill>
-              </a:rPr>
-              <a:t>      - Egzersizde :15 l/dk</a:t>
-            </a:r>
-          </a:p>
-          <a:p>
-            <a:pPr>
-              <a:spcBef>
-                <a:spcPts val="600"/>
-              </a:spcBef>
-            </a:pPr>
-            <a:r>
-              <a:rPr lang="tr-TR" altLang="tr-TR" sz="1200">
-                <a:solidFill>
-                  <a:srgbClr val="0F496F"/>
-                </a:solidFill>
-              </a:rPr>
-              <a:t> Yarış atlarında;</a:t>
-            </a:r>
+            <a:endParaRPr lang="tr-TR" altLang="tr-TR" sz="1200" dirty="0">
+              <a:solidFill>
+                <a:srgbClr val="0F496F"/>
+              </a:solidFill>
+            </a:endParaRPr>
           </a:p>
           <a:p>
             <a:pPr>
@@ -15331,14 +15394,11 @@
               </a:spcBef>
               <a:buNone/>
             </a:pPr>
-            <a:r>
-              <a:rPr lang="tr-TR" altLang="tr-TR" sz="1200">
-                <a:solidFill>
-                  <a:srgbClr val="0F496F"/>
-                </a:solidFill>
-              </a:rPr>
-              <a:t>      - Dinlenimde: 30 l/dk,</a:t>
-            </a:r>
+            <a:endParaRPr lang="tr-TR" altLang="tr-TR" sz="1200" dirty="0">
+              <a:solidFill>
+                <a:srgbClr val="0F496F"/>
+              </a:solidFill>
+            </a:endParaRPr>
           </a:p>
           <a:p>
             <a:pPr>
@@ -15347,14 +15407,11 @@
               </a:spcBef>
               <a:buNone/>
             </a:pPr>
-            <a:r>
-              <a:rPr lang="tr-TR" altLang="tr-TR" sz="1200">
-                <a:solidFill>
-                  <a:srgbClr val="0F496F"/>
-                </a:solidFill>
-              </a:rPr>
-              <a:t>      - Egzersizde:150-300 l/dk</a:t>
-            </a:r>
+            <a:endParaRPr lang="tr-TR" altLang="tr-TR" sz="1200" dirty="0">
+              <a:solidFill>
+                <a:srgbClr val="0F496F"/>
+              </a:solidFill>
+            </a:endParaRPr>
           </a:p>
           <a:p>
             <a:pPr>
@@ -15362,7 +15419,7 @@
               <a:buNone/>
               <a:defRPr/>
             </a:pPr>
-            <a:endParaRPr lang="tr-TR" altLang="tr-TR" sz="1200">
+            <a:endParaRPr lang="tr-TR" altLang="tr-TR" sz="1200" dirty="0">
               <a:solidFill>
                 <a:srgbClr val="0F496F"/>
               </a:solidFill>
